--- a/8-AWS.v1.pptx
+++ b/8-AWS.v1.pptx
@@ -274,7 +274,7 @@
           <a:p>
             <a:fld id="{D4DE4040-5678-4617-BDDC-EE26C9D19E43}" type="datetimeFigureOut">
               <a:rPr lang="sk-SK" smtClean="0"/>
-              <a:t>23.4.2025</a:t>
+              <a:t>20.4.2026</a:t>
             </a:fld>
             <a:endParaRPr lang="sk-SK"/>
           </a:p>
@@ -439,7 +439,7 @@
           <a:p>
             <a:fld id="{A66D66E2-EBC5-4826-85E1-63E9EC1122F9}" type="datetimeFigureOut">
               <a:rPr lang="sk-SK" smtClean="0"/>
-              <a:t>23.4.2025</a:t>
+              <a:t>20.4.2026</a:t>
             </a:fld>
             <a:endParaRPr lang="sk-SK"/>
           </a:p>
@@ -5894,8 +5894,8 @@
           <a:lstStyle/>
           <a:p>
             <a:r>
-              <a:rPr lang="en-US"/>
-              <a:t>2025</a:t>
+              <a:rPr lang="en-US" dirty="0"/>
+              <a:t>2026</a:t>
             </a:r>
             <a:endParaRPr lang="sk-SK" dirty="0"/>
           </a:p>
@@ -8610,7 +8610,7 @@
         </p:spPr>
         <p:txBody>
           <a:bodyPr>
-            <a:normAutofit fontScale="92500" lnSpcReduction="20000"/>
+            <a:normAutofit fontScale="85000" lnSpcReduction="20000"/>
           </a:bodyPr>
           <a:lstStyle/>
           <a:p>
@@ -8643,6 +8643,18 @@
               </a:rPr>
               <a:t></a:t>
             </a:r>
+          </a:p>
+          <a:p>
+            <a:pPr lvl="1"/>
+            <a:r>
+              <a:rPr lang="sk-SK" sz="2000" dirty="0" err="1">
+                <a:sym typeface="Wingdings" panose="05000000000000000000" pitchFamily="2" charset="2"/>
+              </a:rPr>
+              <a:t>Draw.io</a:t>
+            </a:r>
+            <a:endParaRPr lang="sk-SK" sz="2000" dirty="0">
+              <a:sym typeface="Wingdings" panose="05000000000000000000" pitchFamily="2" charset="2"/>
+            </a:endParaRPr>
           </a:p>
           <a:p>
             <a:r>
@@ -9581,10 +9593,10 @@
           <p:nvPr/>
         </p:nvPicPr>
         <p:blipFill>
-          <a:blip r:embed="rId7">
+          <a:blip>
             <a:extLst>
               <a:ext uri="{96DAC541-7B7A-43D3-8B79-37D633B846F1}">
-                <asvg:svgBlip xmlns:asvg="http://schemas.microsoft.com/office/drawing/2016/SVG/main" r:embed="rId8"/>
+                <asvg:svgBlip xmlns:asvg="http://schemas.microsoft.com/office/drawing/2016/SVG/main" r:embed="rId7"/>
               </a:ext>
             </a:extLst>
           </a:blip>
@@ -9639,7 +9651,7 @@
           <p:nvPr/>
         </p:nvPicPr>
         <p:blipFill>
-          <a:blip r:embed="rId9" cstate="print">
+          <a:blip r:embed="rId8" cstate="print">
             <a:extLst>
               <a:ext uri="{28A0092B-C50C-407E-A947-70E740481C1C}">
                 <a14:useLocalDpi xmlns:a14="http://schemas.microsoft.com/office/drawing/2010/main" val="0"/>
@@ -12081,10 +12093,10 @@
           <p:nvPr/>
         </p:nvPicPr>
         <p:blipFill>
-          <a:blip r:embed="rId5">
+          <a:blip>
             <a:extLst>
               <a:ext uri="{96DAC541-7B7A-43D3-8B79-37D633B846F1}">
-                <asvg:svgBlip xmlns:asvg="http://schemas.microsoft.com/office/drawing/2016/SVG/main" r:embed="rId6"/>
+                <asvg:svgBlip xmlns:asvg="http://schemas.microsoft.com/office/drawing/2016/SVG/main" r:embed="rId5"/>
               </a:ext>
             </a:extLst>
           </a:blip>
@@ -12117,10 +12129,10 @@
           <p:nvPr/>
         </p:nvPicPr>
         <p:blipFill>
-          <a:blip r:embed="rId7">
+          <a:blip>
             <a:extLst>
               <a:ext uri="{96DAC541-7B7A-43D3-8B79-37D633B846F1}">
-                <asvg:svgBlip xmlns:asvg="http://schemas.microsoft.com/office/drawing/2016/SVG/main" r:embed="rId8"/>
+                <asvg:svgBlip xmlns:asvg="http://schemas.microsoft.com/office/drawing/2016/SVG/main" r:embed="rId6"/>
               </a:ext>
             </a:extLst>
           </a:blip>
@@ -12153,7 +12165,7 @@
           <p:nvPr/>
         </p:nvPicPr>
         <p:blipFill>
-          <a:blip r:embed="rId9" cstate="print">
+          <a:blip r:embed="rId7" cstate="print">
             <a:extLst>
               <a:ext uri="{28A0092B-C50C-407E-A947-70E740481C1C}">
                 <a14:useLocalDpi xmlns:a14="http://schemas.microsoft.com/office/drawing/2010/main" val="0"/>
@@ -12213,7 +12225,7 @@
           <p:nvPr/>
         </p:nvPicPr>
         <p:blipFill>
-          <a:blip r:embed="rId10" cstate="print">
+          <a:blip r:embed="rId8" cstate="print">
             <a:extLst>
               <a:ext uri="{28A0092B-C50C-407E-A947-70E740481C1C}">
                 <a14:useLocalDpi xmlns:a14="http://schemas.microsoft.com/office/drawing/2010/main" val="0"/>
@@ -18959,10 +18971,10 @@
           <p:nvPr/>
         </p:nvPicPr>
         <p:blipFill>
-          <a:blip r:embed="rId15">
+          <a:blip>
             <a:extLst>
               <a:ext uri="{96DAC541-7B7A-43D3-8B79-37D633B846F1}">
-                <asvg:svgBlip xmlns:asvg="http://schemas.microsoft.com/office/drawing/2016/SVG/main" r:embed="rId16"/>
+                <asvg:svgBlip xmlns:asvg="http://schemas.microsoft.com/office/drawing/2016/SVG/main" r:embed="rId15"/>
               </a:ext>
             </a:extLst>
           </a:blip>
@@ -19049,7 +19061,7 @@
           <p:nvPr/>
         </p:nvPicPr>
         <p:blipFill>
-          <a:blip r:embed="rId17" cstate="print">
+          <a:blip r:embed="rId16" cstate="print">
             <a:extLst>
               <a:ext uri="{28A0092B-C50C-407E-A947-70E740481C1C}">
                 <a14:useLocalDpi xmlns:a14="http://schemas.microsoft.com/office/drawing/2010/main" val="0"/>
@@ -19139,7 +19151,7 @@
           <p:nvPr/>
         </p:nvPicPr>
         <p:blipFill>
-          <a:blip r:embed="rId18" cstate="print">
+          <a:blip r:embed="rId17" cstate="print">
             <a:extLst>
               <a:ext uri="{28A0092B-C50C-407E-A947-70E740481C1C}">
                 <a14:useLocalDpi xmlns:a14="http://schemas.microsoft.com/office/drawing/2010/main" val="0"/>
@@ -20339,10 +20351,10 @@
           <p:nvPr/>
         </p:nvPicPr>
         <p:blipFill>
-          <a:blip r:embed="rId15">
+          <a:blip>
             <a:extLst>
               <a:ext uri="{96DAC541-7B7A-43D3-8B79-37D633B846F1}">
-                <asvg:svgBlip xmlns:asvg="http://schemas.microsoft.com/office/drawing/2016/SVG/main" r:embed="rId16"/>
+                <asvg:svgBlip xmlns:asvg="http://schemas.microsoft.com/office/drawing/2016/SVG/main" r:embed="rId15"/>
               </a:ext>
             </a:extLst>
           </a:blip>
@@ -20429,7 +20441,7 @@
           <p:nvPr/>
         </p:nvPicPr>
         <p:blipFill>
-          <a:blip r:embed="rId17" cstate="print">
+          <a:blip r:embed="rId16" cstate="print">
             <a:extLst>
               <a:ext uri="{28A0092B-C50C-407E-A947-70E740481C1C}">
                 <a14:useLocalDpi xmlns:a14="http://schemas.microsoft.com/office/drawing/2010/main" val="0"/>
@@ -20519,7 +20531,7 @@
           <p:nvPr/>
         </p:nvPicPr>
         <p:blipFill>
-          <a:blip r:embed="rId18" cstate="print">
+          <a:blip r:embed="rId17" cstate="print">
             <a:extLst>
               <a:ext uri="{28A0092B-C50C-407E-A947-70E740481C1C}">
                 <a14:useLocalDpi xmlns:a14="http://schemas.microsoft.com/office/drawing/2010/main" val="0"/>
@@ -20558,7 +20570,7 @@
           <p:nvPr/>
         </p:nvPicPr>
         <p:blipFill>
-          <a:blip r:embed="rId19" cstate="print">
+          <a:blip r:embed="rId18" cstate="print">
             <a:extLst>
               <a:ext uri="{28A0092B-C50C-407E-A947-70E740481C1C}">
                 <a14:useLocalDpi xmlns:a14="http://schemas.microsoft.com/office/drawing/2010/main" val="0"/>
@@ -20634,7 +20646,7 @@
           <p:nvPr/>
         </p:nvPicPr>
         <p:blipFill>
-          <a:blip r:embed="rId20" cstate="print">
+          <a:blip r:embed="rId19" cstate="print">
             <a:extLst>
               <a:ext uri="{28A0092B-C50C-407E-A947-70E740481C1C}">
                 <a14:useLocalDpi xmlns:a14="http://schemas.microsoft.com/office/drawing/2010/main" val="0"/>
@@ -20710,7 +20722,7 @@
           <p:nvPr/>
         </p:nvPicPr>
         <p:blipFill>
-          <a:blip r:embed="rId21" cstate="print">
+          <a:blip r:embed="rId20" cstate="print">
             <a:extLst>
               <a:ext uri="{28A0092B-C50C-407E-A947-70E740481C1C}">
                 <a14:useLocalDpi xmlns:a14="http://schemas.microsoft.com/office/drawing/2010/main" val="0"/>
@@ -20749,7 +20761,7 @@
           <p:nvPr/>
         </p:nvPicPr>
         <p:blipFill>
-          <a:blip r:embed="rId22" cstate="print">
+          <a:blip r:embed="rId21" cstate="print">
             <a:extLst>
               <a:ext uri="{28A0092B-C50C-407E-A947-70E740481C1C}">
                 <a14:useLocalDpi xmlns:a14="http://schemas.microsoft.com/office/drawing/2010/main" val="0"/>
@@ -20788,7 +20800,7 @@
           <p:nvPr/>
         </p:nvPicPr>
         <p:blipFill>
-          <a:blip r:embed="rId23" cstate="print">
+          <a:blip r:embed="rId22" cstate="print">
             <a:extLst>
               <a:ext uri="{28A0092B-C50C-407E-A947-70E740481C1C}">
                 <a14:useLocalDpi xmlns:a14="http://schemas.microsoft.com/office/drawing/2010/main" val="0"/>
@@ -20984,7 +20996,7 @@
           <p:nvPr/>
         </p:nvPicPr>
         <p:blipFill>
-          <a:blip r:embed="rId24" cstate="print">
+          <a:blip r:embed="rId23" cstate="print">
             <a:extLst>
               <a:ext uri="{28A0092B-C50C-407E-A947-70E740481C1C}">
                 <a14:useLocalDpi xmlns:a14="http://schemas.microsoft.com/office/drawing/2010/main" val="0"/>
@@ -21216,7 +21228,7 @@
           <a:p>
             <a:r>
               <a:rPr lang="en-US" sz="1400" dirty="0"/>
-              <a:t>Password: BazyaA3b          Plat</a:t>
+              <a:t>Password: arVWG2gpN         Plat</a:t>
             </a:r>
             <a:r>
               <a:rPr lang="sk-SK" sz="1400" dirty="0"/>
@@ -21643,7 +21655,7 @@
             </a:r>
             <a:r>
               <a:rPr lang="sk-SK" sz="2400" dirty="0"/>
-              <a:t> Server 22.04 LTS </a:t>
+              <a:t> Server 24.04 LTS </a:t>
             </a:r>
             <a:r>
               <a:rPr lang="sk-SK" sz="1600" dirty="0"/>
@@ -21682,7 +21694,7 @@
             </a:r>
             <a:r>
               <a:rPr lang="sk-SK" sz="2400" dirty="0"/>
-              <a:t> type: t2.micro </a:t>
+              <a:t> type: t3.micro </a:t>
             </a:r>
             <a:r>
               <a:rPr lang="sk-SK" sz="1600" dirty="0"/>
@@ -24093,7 +24105,7 @@
           <a:p>
             <a:r>
               <a:rPr lang="sk-SK" sz="2000" dirty="0"/>
-              <a:t>30 regiónov</a:t>
+              <a:t>39 regiónov</a:t>
             </a:r>
           </a:p>
           <a:p>
@@ -24105,7 +24117,7 @@
           <a:p>
             <a:r>
               <a:rPr lang="sk-SK" sz="2000" dirty="0"/>
-              <a:t>V príprave 5 regiónov s 15 AZ</a:t>
+              <a:t>V príprave 7 regiónov</a:t>
             </a:r>
           </a:p>
           <a:p>
@@ -24514,10 +24526,10 @@
           <p:nvPr/>
         </p:nvPicPr>
         <p:blipFill>
-          <a:blip r:embed="rId3">
+          <a:blip>
             <a:extLst>
               <a:ext uri="{96DAC541-7B7A-43D3-8B79-37D633B846F1}">
-                <asvg:svgBlip xmlns:asvg="http://schemas.microsoft.com/office/drawing/2016/SVG/main" r:embed="rId4"/>
+                <asvg:svgBlip xmlns:asvg="http://schemas.microsoft.com/office/drawing/2016/SVG/main" r:embed="rId3"/>
               </a:ext>
             </a:extLst>
           </a:blip>
@@ -24625,10 +24637,10 @@
           <p:nvPr/>
         </p:nvPicPr>
         <p:blipFill>
-          <a:blip r:embed="rId5">
+          <a:blip>
             <a:extLst>
               <a:ext uri="{96DAC541-7B7A-43D3-8B79-37D633B846F1}">
-                <asvg:svgBlip xmlns:asvg="http://schemas.microsoft.com/office/drawing/2016/SVG/main" r:embed="rId6"/>
+                <asvg:svgBlip xmlns:asvg="http://schemas.microsoft.com/office/drawing/2016/SVG/main" r:embed="rId4"/>
               </a:ext>
             </a:extLst>
           </a:blip>
@@ -24661,10 +24673,10 @@
           <p:nvPr/>
         </p:nvPicPr>
         <p:blipFill>
-          <a:blip r:embed="rId7">
+          <a:blip>
             <a:extLst>
               <a:ext uri="{96DAC541-7B7A-43D3-8B79-37D633B846F1}">
-                <asvg:svgBlip xmlns:asvg="http://schemas.microsoft.com/office/drawing/2016/SVG/main" r:embed="rId8"/>
+                <asvg:svgBlip xmlns:asvg="http://schemas.microsoft.com/office/drawing/2016/SVG/main" r:embed="rId5"/>
               </a:ext>
             </a:extLst>
           </a:blip>
@@ -24939,10 +24951,10 @@
           <p:nvPr/>
         </p:nvPicPr>
         <p:blipFill>
-          <a:blip r:embed="rId5">
+          <a:blip>
             <a:extLst>
               <a:ext uri="{96DAC541-7B7A-43D3-8B79-37D633B846F1}">
-                <asvg:svgBlip xmlns:asvg="http://schemas.microsoft.com/office/drawing/2016/SVG/main" r:embed="rId6"/>
+                <asvg:svgBlip xmlns:asvg="http://schemas.microsoft.com/office/drawing/2016/SVG/main" r:embed="rId4"/>
               </a:ext>
             </a:extLst>
           </a:blip>
@@ -24975,10 +24987,10 @@
           <p:nvPr/>
         </p:nvPicPr>
         <p:blipFill>
-          <a:blip r:embed="rId7">
+          <a:blip>
             <a:extLst>
               <a:ext uri="{96DAC541-7B7A-43D3-8B79-37D633B846F1}">
-                <asvg:svgBlip xmlns:asvg="http://schemas.microsoft.com/office/drawing/2016/SVG/main" r:embed="rId8"/>
+                <asvg:svgBlip xmlns:asvg="http://schemas.microsoft.com/office/drawing/2016/SVG/main" r:embed="rId5"/>
               </a:ext>
             </a:extLst>
           </a:blip>
@@ -25101,10 +25113,10 @@
           <p:nvPr/>
         </p:nvPicPr>
         <p:blipFill>
-          <a:blip r:embed="rId9">
+          <a:blip>
             <a:extLst>
               <a:ext uri="{96DAC541-7B7A-43D3-8B79-37D633B846F1}">
-                <asvg:svgBlip xmlns:asvg="http://schemas.microsoft.com/office/drawing/2016/SVG/main" r:embed="rId10"/>
+                <asvg:svgBlip xmlns:asvg="http://schemas.microsoft.com/office/drawing/2016/SVG/main" r:embed="rId6"/>
               </a:ext>
             </a:extLst>
           </a:blip>
@@ -25137,7 +25149,7 @@
           <p:nvPr/>
         </p:nvPicPr>
         <p:blipFill>
-          <a:blip r:embed="rId11" cstate="print">
+          <a:blip r:embed="rId7" cstate="print">
             <a:extLst>
               <a:ext uri="{28A0092B-C50C-407E-A947-70E740481C1C}">
                 <a14:useLocalDpi xmlns:a14="http://schemas.microsoft.com/office/drawing/2010/main" val="0"/>
@@ -25404,7 +25416,7 @@
           <p:nvPr/>
         </p:nvPicPr>
         <p:blipFill>
-          <a:blip r:embed="rId12" cstate="print">
+          <a:blip r:embed="rId8" cstate="print">
             <a:extLst>
               <a:ext uri="{28A0092B-C50C-407E-A947-70E740481C1C}">
                 <a14:useLocalDpi xmlns:a14="http://schemas.microsoft.com/office/drawing/2010/main" val="0"/>
@@ -25464,7 +25476,7 @@
           <p:nvPr/>
         </p:nvPicPr>
         <p:blipFill>
-          <a:blip r:embed="rId13" cstate="print">
+          <a:blip r:embed="rId9" cstate="print">
             <a:extLst>
               <a:ext uri="{28A0092B-C50C-407E-A947-70E740481C1C}">
                 <a14:useLocalDpi xmlns:a14="http://schemas.microsoft.com/office/drawing/2010/main" val="0"/>
